--- a/deck/vector-marketing-01-obsidian-neon.pptx
+++ b/deck/vector-marketing-01-obsidian-neon.pptx
@@ -3102,7 +3102,7 @@
       <p:grpSpPr/>
       <p:pic>
         <p:nvPicPr>
-          <p:cNvPr id="2" name="Picture 1" descr="hero_marketing.png"/>
+          <p:cNvPr id="2" name="Picture 1" descr="hero-marketing.png"/>
           <p:cNvPicPr>
             <a:picLocks noChangeAspect="1"/>
           </p:cNvPicPr>
@@ -3565,7 +3565,7 @@
                 </a:solidFill>
                 <a:latin typeface="Inter Display"/>
               </a:rPr>
-              <a:t>170+</a:t>
+              <a:t>158</a:t>
             </a:r>
           </a:p>
         </p:txBody>
@@ -3683,7 +3683,7 @@
                 </a:solidFill>
                 <a:latin typeface="Inter Display"/>
               </a:rPr>
-              <a:t>29</a:t>
+              <a:t>40</a:t>
             </a:r>
           </a:p>
         </p:txBody>
@@ -5057,7 +5057,7 @@
                 </a:solidFill>
                 <a:latin typeface="JetBrains Mono"/>
               </a:rPr>
-              <a:t>Vector Marketing · Hermes Agent · Osmosy</a:t>
+              <a:t>Vector Marketing · Osmosy</a:t>
             </a:r>
           </a:p>
         </p:txBody>
@@ -6273,7 +6273,7 @@
                 </a:solidFill>
                 <a:latin typeface="JetBrains Mono"/>
               </a:rPr>
-              <a:t>Vector Marketing · Hermes Agent · Osmosy</a:t>
+              <a:t>Vector Marketing · Osmosy</a:t>
             </a:r>
           </a:p>
         </p:txBody>
@@ -6663,7 +6663,7 @@
                 </a:solidFill>
                 <a:latin typeface="Inter"/>
               </a:rPr>
-              <a:t>29 PM-скиллов в 4 группах, 19 агентов, 170+ навыков</a:t>
+              <a:t>40 PM-скиллов в 4 группах, 19 агентов, 158 навыков</a:t>
             </a:r>
           </a:p>
         </p:txBody>
@@ -7162,7 +7162,7 @@
                 </a:solidFill>
                 <a:latin typeface="JetBrains Mono"/>
               </a:rPr>
-              <a:t>Vector Marketing · Hermes Agent · Osmosy</a:t>
+              <a:t>Vector Marketing · Osmosy</a:t>
             </a:r>
           </a:p>
         </p:txBody>
@@ -7311,7 +7311,7 @@
                 </a:solidFill>
                 <a:latin typeface="Inter Display"/>
               </a:rPr>
-              <a:t>19 агентов · 29 методик</a:t>
+              <a:t>19 агентов · 40 методик</a:t>
             </a:r>
           </a:p>
         </p:txBody>
@@ -8521,7 +8521,7 @@
                 </a:solidFill>
                 <a:latin typeface="JetBrains Mono"/>
               </a:rPr>
-              <a:t>Vector Marketing · Hermes Agent · Osmosy</a:t>
+              <a:t>Vector Marketing · Osmosy</a:t>
             </a:r>
           </a:p>
         </p:txBody>
@@ -9720,7 +9720,7 @@
                 </a:solidFill>
                 <a:latin typeface="JetBrains Mono"/>
               </a:rPr>
-              <a:t>Vector Marketing · Hermes Agent · Osmosy</a:t>
+              <a:t>Vector Marketing · Osmosy</a:t>
             </a:r>
           </a:p>
         </p:txBody>
@@ -10919,7 +10919,7 @@
                 </a:solidFill>
                 <a:latin typeface="JetBrains Mono"/>
               </a:rPr>
-              <a:t>Vector Marketing · Hermes Agent · Osmosy</a:t>
+              <a:t>Vector Marketing · Osmosy</a:t>
             </a:r>
           </a:p>
         </p:txBody>
@@ -11471,7 +11471,7 @@
                 </a:solidFill>
                 <a:latin typeface="Inter"/>
               </a:rPr>
-              <a:t>agents/*.md (19 ролей) + Hermes profile + 170+ skills + MCP-инструменты: Яндекс Метрика/Директ API, MPSTATS, ДaData, Wordstat, карты</a:t>
+              <a:t>agents/*.md (19 ролей) + Hermes profile + 158 навыков в 6 наборах + MCP-инструменты: Яндекс Метрика/Директ API, MPSTATS, ДaData, Wordstat, карты</a:t>
             </a:r>
           </a:p>
         </p:txBody>
@@ -11703,7 +11703,7 @@
                 </a:solidFill>
                 <a:latin typeface="JetBrains Mono"/>
               </a:rPr>
-              <a:t>Vector Marketing · Hermes Agent · Osmosy</a:t>
+              <a:t>Vector Marketing · Osmosy</a:t>
             </a:r>
           </a:p>
         </p:txBody>
@@ -12649,7 +12649,7 @@
                 </a:solidFill>
                 <a:latin typeface="JetBrains Mono"/>
               </a:rPr>
-              <a:t>Vector Marketing · Hermes Agent · Osmosy</a:t>
+              <a:t>Vector Marketing · Osmosy</a:t>
             </a:r>
           </a:p>
         </p:txBody>
@@ -12833,7 +12833,7 @@
                 </a:solidFill>
                 <a:latin typeface="Inter Display"/>
               </a:rPr>
-              <a:t>29 PM-скиллов: метод, а не промпт</a:t>
+              <a:t>40 PM-скиллов: метод, а не промпт</a:t>
             </a:r>
           </a:p>
         </p:txBody>
@@ -13065,7 +13065,7 @@
                 </a:solidFill>
                 <a:latin typeface="Inter"/>
               </a:rPr>
-              <a:t>ICP и CJM как деливераблы</a:t>
+              <a:t>SWOT/PESTLE/5 сил Портера</a:t>
             </a:r>
           </a:p>
         </p:txBody>
@@ -13100,7 +13100,7 @@
                 </a:solidFill>
                 <a:latin typeface="Inter"/>
               </a:rPr>
-              <a:t>Конкуренты: библиотека</a:t>
+              <a:t>Персоны и сегменты из</a:t>
             </a:r>
           </a:p>
         </p:txBody>
@@ -13135,7 +13135,7 @@
                 </a:solidFill>
                 <a:latin typeface="Inter"/>
               </a:rPr>
-              <a:t>Директа, отзывы, МП</a:t>
+              <a:t>интервью, CJM</a:t>
             </a:r>
           </a:p>
         </p:txBody>
@@ -13778,7 +13778,7 @@
                 </a:solidFill>
                 <a:latin typeface="Inter"/>
               </a:rPr>
-              <a:t>29 методик PM Skills Marketplace + адаптация РФ</a:t>
+              <a:t>40 методик PM Skills Marketplace + адаптация РФ</a:t>
             </a:r>
           </a:p>
         </p:txBody>
@@ -13813,7 +13813,7 @@
                 </a:solidFill>
                 <a:latin typeface="Inter"/>
               </a:rPr>
-              <a:t>Источник: github.com/phuryn/pm-skills (MIT, The Product Compass). Взято 29 из 68 — остальные дубли или SDLC-домен.</a:t>
+              <a:t>Источник: github.com/phuryn/pm-skills (MIT, The Product Compass). Взято 40 из 68 — остальные SDLC-домены и найм, вне профиля агентства.</a:t>
             </a:r>
           </a:p>
         </p:txBody>
@@ -13918,7 +13918,7 @@
                 </a:solidFill>
                 <a:latin typeface="JetBrains Mono"/>
               </a:rPr>
-              <a:t>Vector Marketing · Hermes Agent · Osmosy</a:t>
+              <a:t>Vector Marketing · Osmosy</a:t>
             </a:r>
           </a:p>
         </p:txBody>
@@ -15296,7 +15296,7 @@
                 </a:solidFill>
                 <a:latin typeface="JetBrains Mono"/>
               </a:rPr>
-              <a:t>Vector Marketing · Hermes Agent · Osmosy</a:t>
+              <a:t>Vector Marketing · Osmosy</a:t>
             </a:r>
           </a:p>
         </p:txBody>
@@ -16242,7 +16242,7 @@
                 </a:solidFill>
                 <a:latin typeface="JetBrains Mono"/>
               </a:rPr>
-              <a:t>Vector Marketing · Hermes Agent · Osmosy</a:t>
+              <a:t>Vector Marketing · Osmosy</a:t>
             </a:r>
           </a:p>
         </p:txBody>
